--- a/dist/초2/진로·직업/일과협력/초2_진로·직업_일과협력_01_직업과협력.pptx
+++ b/dist/초2/진로·직업/일과협력/초2_진로·직업_일과협력_01_직업과협력.pptx
@@ -114,34 +114,34 @@
   <p:extLst>
     <p:ext uri="{521415D9-36F7-43E2-AB2F-B90AF26B5E84}">
       <p14:sectionLst xmlns:p14="http://schemas.microsoft.com/office/powerpoint/2010/main">
-        <p14:section name="도입" id="{e82dcfe0-312b-20ac-18f1-fe2f3ed81391}">
+        <p14:section name="도입" id="{5ec0e6de-d182-6b95-a8ab-e1998c99d2c8}">
           <p14:sldIdLst>
             <p14:sldId id="256"/>
             <p14:sldId id="257"/>
           </p14:sldIdLst>
         </p14:section>
-        <p14:section name="개념" id="{eb1fc0e0-79d5-aa09-3fb9-f7308f5788c4}">
+        <p14:section name="개념" id="{94997b6d-c9d3-fe11-f496-131539fb40a8}">
           <p14:sldIdLst>
             <p14:sldId id="258"/>
           </p14:sldIdLst>
         </p14:section>
-        <p14:section name="연습" id="{823b39b0-fd0c-10fd-2874-56f439881775}">
+        <p14:section name="연습" id="{a2028cf6-72da-1bf7-f001-4e8aedba10a8}">
           <p14:sldIdLst>
             <p14:sldId id="259"/>
             <p14:sldId id="260"/>
           </p14:sldIdLst>
         </p14:section>
-        <p14:section name="확인" id="{fb64f2f8-dda3-8cdb-8680-02523e1e52f1}">
+        <p14:section name="확인" id="{1986d406-8577-f9c6-2899-11526f77c20b}">
           <p14:sldIdLst>
             <p14:sldId id="261"/>
           </p14:sldIdLst>
         </p14:section>
-        <p14:section name="정리" id="{83639e9a-ded6-231f-eaeb-839770098210}">
+        <p14:section name="정리" id="{44c93c6b-311d-4e0c-070c-81d506da0af3}">
           <p14:sldIdLst>
             <p14:sldId id="262"/>
           </p14:sldIdLst>
         </p14:section>
-        <p14:section name="보충" id="{26a16708-a780-2c1b-54ed-af8f02ba67fb}">
+        <p14:section name="보충" id="{d42d2ed4-1a61-c5e3-7b55-eea5f9336ee4}">
           <p14:sldIdLst>
             <p14:sldId id="263"/>
           </p14:sldIdLst>
